--- a/level4/slides/Level4_Lesson1_Slides.pptx
+++ b/level4/slides/Level4_Lesson1_Slides.pptx
@@ -1208,7 +1208,7 @@
           </a:p>
           <a:p>
             <a:r>
-              <a:t>No speaker? Read the script with a volunteer at a natural, friendly speed, two times. Say gonna and wanna where the script has them.</a:t>
+              <a:t>No speaker? Read the script with a volunteer at a natural, friendly speed, two times. The script says going to and want to. People often say gonna and wanna; learners only need to recognize those words.</a:t>
             </a:r>
           </a:p>
           <a:p>
@@ -1268,7 +1268,7 @@
           </a:p>
           <a:p>
             <a:r>
-              <a:t>Ms. Grant: Good evening! I'm Ms. Grant, your teacher. Tonight we're gonna find things we have in common.</a:t>
+              <a:t>Ms. Grant: Good evening! I'm Ms. Grant, your teacher. Tonight we're going to find things we have in common.</a:t>
             </a:r>
           </a:p>
           <a:p>
@@ -1313,7 +1313,7 @@
           </a:p>
           <a:p>
             <a:r>
-              <a:t>Ahmed: Yes, I ran a five K last year. I didn't win, but I finished!</a:t>
+              <a:t>Ahmed: Yes, I ran a 5k last year. I didn't win, but I finished!</a:t>
             </a:r>
           </a:p>
           <a:p>
@@ -1328,17 +1328,17 @@
           </a:p>
           <a:p>
             <a:r>
-              <a:t>Ms. Grant: Good job! Now, what have you never done, but you wanna try?</a:t>
-            </a:r>
-          </a:p>
-          <a:p>
-            <a:r>
-              <a:t>Ahmed: I wanna go camping. I've never slept in a tent.</a:t>
-            </a:r>
-          </a:p>
-          <a:p>
-            <a:r>
-              <a:t>Lucía: And I wanna try sushi. I've never eaten it.</a:t>
+              <a:t>Ms. Grant: Good job! Now, what have you never done, but you want to try?</a:t>
+            </a:r>
+          </a:p>
+          <a:p>
+            <a:r>
+              <a:t>Ahmed: I want to go camping. I've never slept in a tent.</a:t>
+            </a:r>
+          </a:p>
+          <a:p>
+            <a:r>
+              <a:t>Lucía: And I want to try sushi. I've never eaten it.</a:t>
             </a:r>
           </a:p>
           <a:p>
@@ -1658,12 +1658,12 @@
           <a:lstStyle/>
           <a:p>
             <a:r>
-              <a:t>"Hear it, say it" (3 min). Point to the script lines. gonna = going to: "Tonight we're gonna find things we have in common." wanna = want to: "I wanna go camping."</a:t>
-            </a:r>
-          </a:p>
-          <a:p>
-            <a:r>
-              <a:t>Say: "You will hear gonna and wanna. You can say going to and want to."</a:t>
+              <a:t>"Hear it, say it" (3 min). Point to the script lines. gonna = going to: "Tonight we're going to find things we have in common." wanna = want to: "I want to go camping."</a:t>
+            </a:r>
+          </a:p>
+          <a:p>
+            <a:r>
+              <a:t>Say: "People often say gonna and wanna. This listening uses going to and want to."</a:t>
             </a:r>
           </a:p>
           <a:p>
@@ -1673,7 +1673,7 @@
           </a:p>
           <a:p>
             <a:r>
-              <a:t>Reductions: learners need to understand gonna and wanna; they can always say going to and want to.</a:t>
+              <a:t>Reductions: the listening says going to and want to. People often say gonna and wanna. Learners only need to recognize the short forms.</a:t>
             </a:r>
           </a:p>
           <a:p>
@@ -16681,6 +16681,17 @@
               <a:buNone/>
             </a:pPr>
             <a:r>
+              <a:rPr lang="en-US" sz="2000" dirty="0" b="1">
+                <a:solidFill>
+                  <a:srgbClr val="5B3FC4"/>
+                </a:solidFill>
+                <a:latin typeface="Lexend Deca" pitchFamily="34" charset="0"/>
+                <a:ea typeface="Lexend Deca" pitchFamily="34" charset="-122"/>
+                <a:cs typeface="Lexend Deca" pitchFamily="34" charset="-120"/>
+              </a:rPr>
+              <a:t>gonna</a:t>
+            </a:r>
+            <a:r>
               <a:rPr lang="en-US" sz="2000" dirty="0">
                 <a:solidFill>
                   <a:srgbClr val="1B2236"/>
@@ -16689,7 +16700,7 @@
                 <a:ea typeface="Lexend Deca" pitchFamily="34" charset="-122"/>
                 <a:cs typeface="Lexend Deca" pitchFamily="34" charset="-120"/>
               </a:rPr>
-              <a:t>You will hear </a:t>
+              <a:t> and </a:t>
             </a:r>
             <a:r>
               <a:rPr lang="en-US" sz="2000" dirty="0" b="1">
@@ -16700,7 +16711,7 @@
                 <a:ea typeface="Lexend Deca" pitchFamily="34" charset="-122"/>
                 <a:cs typeface="Lexend Deca" pitchFamily="34" charset="-120"/>
               </a:rPr>
-              <a:t>gonna</a:t>
+              <a:t>wanna</a:t>
             </a:r>
             <a:r>
               <a:rPr lang="en-US" sz="2000" dirty="0">
@@ -16711,29 +16722,7 @@
                 <a:ea typeface="Lexend Deca" pitchFamily="34" charset="-122"/>
                 <a:cs typeface="Lexend Deca" pitchFamily="34" charset="-120"/>
               </a:rPr>
-              <a:t> and </a:t>
-            </a:r>
-            <a:r>
-              <a:rPr lang="en-US" sz="2000" dirty="0" b="1">
-                <a:solidFill>
-                  <a:srgbClr val="5B3FC4"/>
-                </a:solidFill>
-                <a:latin typeface="Lexend Deca" pitchFamily="34" charset="0"/>
-                <a:ea typeface="Lexend Deca" pitchFamily="34" charset="-122"/>
-                <a:cs typeface="Lexend Deca" pitchFamily="34" charset="-120"/>
-              </a:rPr>
-              <a:t>wanna</a:t>
-            </a:r>
-            <a:r>
-              <a:rPr lang="en-US" sz="2000" dirty="0">
-                <a:solidFill>
-                  <a:srgbClr val="1B2236"/>
-                </a:solidFill>
-                <a:latin typeface="Lexend Deca" pitchFamily="34" charset="0"/>
-                <a:ea typeface="Lexend Deca" pitchFamily="34" charset="-122"/>
-                <a:cs typeface="Lexend Deca" pitchFamily="34" charset="-120"/>
-              </a:rPr>
-              <a:t>.</a:t>
+              <a:t> are short forms. This listening uses the full forms.</a:t>
             </a:r>
             <a:endParaRPr lang="en-US" sz="2000" dirty="0"/>
           </a:p>
@@ -16910,7 +16899,7 @@
                 <a:ea typeface="Lexend Deca" pitchFamily="34" charset="-122"/>
                 <a:cs typeface="Lexend Deca" pitchFamily="34" charset="-120"/>
               </a:rPr>
-              <a:t>gonna</a:t>
+              <a:t>going to</a:t>
             </a:r>
             <a:r>
               <a:rPr lang="en-US" sz="1800" dirty="0" b="1">
@@ -16997,7 +16986,7 @@
                 <a:ea typeface="Lexend Deca" pitchFamily="34" charset="-122"/>
                 <a:cs typeface="Lexend Deca" pitchFamily="34" charset="-120"/>
               </a:rPr>
-              <a:t>wanna</a:t>
+              <a:t>want to</a:t>
             </a:r>
             <a:r>
               <a:rPr lang="en-US" sz="1800" dirty="0" b="1">

--- a/level4/slides/Level4_Lesson1_Slides.pptx
+++ b/level4/slides/Level4_Lesson1_Slides.pptx
@@ -1323,7 +1323,7 @@
           </a:p>
           <a:p>
             <a:r>
-              <a:t>Ahmed: Great. So we've both seen snow, and we've both run a race.</a:t>
+              <a:t>Ahmed: Great. So we have both seen snow, and we have both run a race.</a:t>
             </a:r>
           </a:p>
           <a:p>

--- a/level4/slides/Level4_Lesson1_Slides.pptx
+++ b/level4/slides/Level4_Lesson1_Slides.pptx
@@ -1203,7 +1203,7 @@
           </a:p>
           <a:p>
             <a:r>
-              <a:t>The audio (about 2:04) is coming soon. When it is ready, it plays the conversation once; press play again for play 2. Until then, read the listening script (at the end of these notes) with a volunteer.</a:t>
+              <a:t>The audio (L4_L1_listening.mp3, about 2:05) plays the conversation once. Press play again for play 2. A third play is fine if the class needs it.</a:t>
             </a:r>
           </a:p>
           <a:p>
@@ -1213,7 +1213,7 @@
           </a:p>
           <a:p>
             <a:r>
-              <a:t>Audio: the listening audio for this lesson (about 2:04) is coming soon. It will use computer-generated voices (Chatterbox TTS cloned from synthetic Kokoro-82M reference clips); no recordings of real people. Until it is ready, read the listening script (in the notes of the Before You Listen slide) with a volunteer. The names and the story are invented.</a:t>
+              <a:t>Audio: synthetic voices, computer-generated (Chatterbox TTS cloned from Kokoro-82M reference clips). No recordings of real people. The names and the story are invented.</a:t>
             </a:r>
           </a:p>
           <a:p>
@@ -1224,126 +1224,6 @@
           <a:p>
             <a:r>
               <a:t>Picture: Twemoji graphics by Twitter, Inc. and other contributors (https://github.com/jdecked/twemoji), CC BY 4.0 (https://creativecommons.org/licenses/by/4.0/); resized and combined, with signs and labels (images/CREDITS.md).</a:t>
-            </a:r>
-          </a:p>
-          <a:p>
-            <a:r>
-              <a:t>Listening script (the audio is coming soon; until then, read it aloud with a volunteer at a normal, friendly speed):</a:t>
-            </a:r>
-          </a:p>
-          <a:p>
-            <a:r>
-              <a:t>Narrator: Lesson one. It's the first night of an English class at a community center. Lucía and Ahmed meet before class.</a:t>
-            </a:r>
-          </a:p>
-          <a:p>
-            <a:r>
-              <a:t>Ahmed: Hi, I'm Ahmed. Is this seat free?</a:t>
-            </a:r>
-          </a:p>
-          <a:p>
-            <a:r>
-              <a:t>Lucía: Sure. I'm Lucía. Nice to meet you. Is this your first class here?</a:t>
-            </a:r>
-          </a:p>
-          <a:p>
-            <a:r>
-              <a:t>Ahmed: Yes, it is. Have you ever taken a class at this center?</a:t>
-            </a:r>
-          </a:p>
-          <a:p>
-            <a:r>
-              <a:t>Lucía: No, I haven't. But my sister has. What kind of work do you do?</a:t>
-            </a:r>
-          </a:p>
-          <a:p>
-            <a:r>
-              <a:t>Ahmed: I work at a warehouse. Have you ever worked in a restaurant?</a:t>
-            </a:r>
-          </a:p>
-          <a:p>
-            <a:r>
-              <a:t>Lucía: Yes, I have. I worked in a pizza restaurant in 2019. It was hard, but I liked it.</a:t>
-            </a:r>
-          </a:p>
-          <a:p>
-            <a:r>
-              <a:t>Ms. Grant: Good evening! I'm Ms. Grant, your teacher. Tonight we're going to find things we have in common.</a:t>
-            </a:r>
-          </a:p>
-          <a:p>
-            <a:r>
-              <a:t>Ms. Grant: Lucía and Ahmed, find two things you've both done.</a:t>
-            </a:r>
-          </a:p>
-          <a:p>
-            <a:r>
-              <a:t>Lucía: OK. Ahmed, have you ever seen snow?</a:t>
-            </a:r>
-          </a:p>
-          <a:p>
-            <a:r>
-              <a:t>Ahmed: Yes! I saw snow for the first time last winter. It was cold, but beautiful.</a:t>
-            </a:r>
-          </a:p>
-          <a:p>
-            <a:r>
-              <a:t>Lucía: Me too. I've seen snow two times. Have you ever ridden a horse?</a:t>
-            </a:r>
-          </a:p>
-          <a:p>
-            <a:r>
-              <a:t>Ahmed: No, never. I've never ridden a horse. Have you?</a:t>
-            </a:r>
-          </a:p>
-          <a:p>
-            <a:r>
-              <a:t>Lucía: Yes, I have.</a:t>
-            </a:r>
-          </a:p>
-          <a:p>
-            <a:r>
-              <a:t>Ahmed: Really? When did you do that?</a:t>
-            </a:r>
-          </a:p>
-          <a:p>
-            <a:r>
-              <a:t>Lucía: When I was ten, on my uncle's farm. OK, snow is one thing. Have you ever run a race?</a:t>
-            </a:r>
-          </a:p>
-          <a:p>
-            <a:r>
-              <a:t>Ahmed: Yes, I ran a 5k last year. I didn't win, but I finished!</a:t>
-            </a:r>
-          </a:p>
-          <a:p>
-            <a:r>
-              <a:t>Lucía: I've run a race, too. My company has a race every summer.</a:t>
-            </a:r>
-          </a:p>
-          <a:p>
-            <a:r>
-              <a:t>Ahmed: Great. So we have both seen snow, and we have both run a race.</a:t>
-            </a:r>
-          </a:p>
-          <a:p>
-            <a:r>
-              <a:t>Ms. Grant: Good job! Now, what have you never done, but you want to try?</a:t>
-            </a:r>
-          </a:p>
-          <a:p>
-            <a:r>
-              <a:t>Ahmed: I want to go camping. I've never slept in a tent.</a:t>
-            </a:r>
-          </a:p>
-          <a:p>
-            <a:r>
-              <a:t>Lucía: And I want to try sushi. I've never eaten it.</a:t>
-            </a:r>
-          </a:p>
-          <a:p>
-            <a:r>
-              <a:t>Narrator: That's the end of the listening.</a:t>
             </a:r>
           </a:p>
         </p:txBody>
@@ -3023,7 +2903,7 @@
           </a:p>
           <a:p>
             <a:r>
-              <a:t>Audio: the listening audio for this lesson (about 2:04) is coming soon. It will use computer-generated voices (Chatterbox TTS cloned from synthetic Kokoro-82M reference clips); no recordings of real people. Until it is ready, read the listening script (in the notes of the Before You Listen slide) with a volunteer. The names and the story are invented.</a:t>
+              <a:t>Audio: synthetic voices, computer-generated (Chatterbox TTS cloned from Kokoro-82M reference clips). No recordings of real people. The names and the story are invented.</a:t>
             </a:r>
           </a:p>
           <a:p>
@@ -12311,7 +12191,7 @@
                 <a:ea typeface="Lexend Deca" pitchFamily="34" charset="-122"/>
                 <a:cs typeface="Lexend Deca" pitchFamily="34" charset="-120"/>
               </a:rPr>
-              <a:t>Audio (about 2:04): coming soon.</a:t>
+              <a:t>Audio: about 2:05. It plays once.</a:t>
             </a:r>
             <a:endParaRPr lang="en-US" sz="2200" dirty="0"/>
           </a:p>
@@ -36680,7 +36560,7 @@
                 <a:ea typeface="Lexend Deca" pitchFamily="34" charset="-122"/>
                 <a:cs typeface="Lexend Deca" pitchFamily="34" charset="-120"/>
               </a:rPr>
-              <a:t>Audio (coming soon): synthetic voices made with Chatterbox TTS (MIT License), cloned from short synthetic reference clips made with Kokoro-82M (Apache License 2.0). No recordings of real people. Each file will carry an inaudible Perth watermark marking it as AI-generated. Font: Lexend Deca (OFL 1.1).</a:t>
+              <a:t>Audio: synthetic voices made with Chatterbox TTS (MIT License), cloned from short synthetic reference clips made with Kokoro-82M (Apache License 2.0). No recordings of real people were used. Each file carries an inaudible Perth watermark marking it as AI-generated. Font: Lexend Deca (OFL 1.1).</a:t>
             </a:r>
             <a:endParaRPr lang="en-US" sz="1350" dirty="0" b="0"/>
           </a:p>

--- a/level4/slides/Level4_Lesson1_Slides.pptx
+++ b/level4/slides/Level4_Lesson1_Slides.pptx
@@ -1553,7 +1553,7 @@
           </a:p>
           <a:p>
             <a:r>
-              <a:t>Reductions: the listening says going to and want to. People often say gonna and wanna. Learners only need to recognize the short forms.</a:t>
+              <a:t>Everyday English: people often say gonna (going to) and wanna (want to). Learners will hear them often. They are fine in casual talk; in writing, at a job interview, or in a formal email, use going to and want to. The listening uses the full forms.</a:t>
             </a:r>
           </a:p>
           <a:p>
@@ -16580,7 +16580,7 @@
                 <a:ea typeface="Lexend Deca" pitchFamily="34" charset="-122"/>
                 <a:cs typeface="Lexend Deca" pitchFamily="34" charset="-120"/>
               </a:rPr>
-              <a:t> and </a:t>
+              <a:t> = going to, </a:t>
             </a:r>
             <a:r>
               <a:rPr lang="en-US" sz="2000" dirty="0" b="1">
@@ -16602,7 +16602,7 @@
                 <a:ea typeface="Lexend Deca" pitchFamily="34" charset="-122"/>
                 <a:cs typeface="Lexend Deca" pitchFamily="34" charset="-120"/>
               </a:rPr>
-              <a:t> are short forms. This listening uses the full forms.</a:t>
+              <a:t> = want to: fine in everyday talk.</a:t>
             </a:r>
             <a:endParaRPr lang="en-US" sz="2000" dirty="0"/>
           </a:p>
